--- a/docs/使用技術.pptx
+++ b/docs/使用技術.pptx
@@ -3559,7 +3559,7 @@
                 <a:ea typeface="Yu Gothic" pitchFamily="34" charset="-122"/>
                 <a:cs typeface="Yu Gothic" pitchFamily="34" charset="-120"/>
               </a:rPr>
-              <a:t>H2 Database</a:t>
+              <a:t>PostgreSQL</a:t>
             </a:r>
             <a:endParaRPr lang="en-US" sz="1500" dirty="0"/>
           </a:p>
@@ -3576,7 +3576,7 @@
                 <a:ea typeface="Yu Gothic" pitchFamily="34" charset="-122"/>
                 <a:cs typeface="Yu Gothic" pitchFamily="34" charset="-120"/>
               </a:rPr>
-              <a:t>インメモリDB</a:t>
+              <a:t>本番想定DB</a:t>
             </a:r>
             <a:endParaRPr lang="en-US" sz="1500" dirty="0"/>
           </a:p>
@@ -3593,7 +3593,7 @@
                 <a:ea typeface="Yu Gothic" pitchFamily="34" charset="-122"/>
                 <a:cs typeface="Yu Gothic" pitchFamily="34" charset="-120"/>
               </a:rPr>
-              <a:t>（開発用）</a:t>
+              <a:t>（Flyway管理／テストはH2）</a:t>
             </a:r>
             <a:endParaRPr lang="en-US" sz="1500" dirty="0"/>
           </a:p>
@@ -3759,7 +3759,7 @@
                 <a:ea typeface="Yu Gothic" pitchFamily="34" charset="-122"/>
                 <a:cs typeface="Yu Gothic" pitchFamily="34" charset="-120"/>
               </a:rPr>
-              <a:t>Spring Web ／ Spring Data JPA ／ Bean Validation ／ Spring Boot Starter Thymeleaf</a:t>
+              <a:t>Spring Web ／ Spring Data JPA ／ Bean Validation ／ Spring Boot Starter Thymeleaf ／ Flyway ／ PostgreSQL JDBC Driver</a:t>
             </a:r>
             <a:endParaRPr lang="en-US" sz="1300" dirty="0"/>
           </a:p>
@@ -4731,7 +4731,7 @@
                 <a:ea typeface="Yu Gothic" pitchFamily="34" charset="-122"/>
                 <a:cs typeface="Yu Gothic" pitchFamily="34" charset="-120"/>
               </a:rPr>
-              <a:t>DB：H2（インメモリ）</a:t>
+              <a:t>DB：PostgreSQL（Flywayでスキーマ管理）</a:t>
             </a:r>
             <a:endParaRPr lang="en-US" sz="1250" dirty="0"/>
           </a:p>
@@ -4748,7 +4748,7 @@
                 <a:ea typeface="Yu Gothic" pitchFamily="34" charset="-122"/>
                 <a:cs typeface="Yu Gothic" pitchFamily="34" charset="-120"/>
               </a:rPr>
-              <a:t>ITEM（商品マスタ） ／ SALE・SALE_ITEM（売上ヘッダ・明細）　※起動時に data.sql で初期データを投入</a:t>
+              <a:t>ITEM（商品マスタ） ／ SALE・SALE_ITEM（売上ヘッダ・明細）　※Flywayマイグレーション（V1/V2）でスキーマ・初期データを投入</a:t>
             </a:r>
             <a:endParaRPr lang="en-US" sz="1250" dirty="0"/>
           </a:p>
@@ -7348,7 +7348,7 @@
                 <a:ea typeface="Yu Gothic" pitchFamily="34" charset="-122"/>
                 <a:cs typeface="Yu Gothic" pitchFamily="34" charset="-120"/>
               </a:rPr>
-              <a:t>curl／ブラウザ操作で</a:t>
+              <a:t>curl／ブラウザ操作（Playwright）で</a:t>
             </a:r>
             <a:endParaRPr lang="en-US" sz="1200" dirty="0"/>
           </a:p>
@@ -7411,7 +7411,7 @@
                 <a:ea typeface="Yu Gothic" pitchFamily="34" charset="-122"/>
                 <a:cs typeface="Yu Gothic" pitchFamily="34" charset="-120"/>
               </a:rPr>
-              <a:t>中身をH2コンソールで確認</a:t>
+              <a:t>中身をpsql（またはpgAdmin）で確認</a:t>
             </a:r>
             <a:endParaRPr lang="en-US" sz="1200" dirty="0"/>
           </a:p>
@@ -8171,7 +8171,7 @@
                 <a:ea typeface="Yu Gothic" pitchFamily="34" charset="-122"/>
                 <a:cs typeface="Yu Gothic" pitchFamily="34" charset="-120"/>
               </a:rPr>
-              <a:t>A. 現状のDBはH2（インメモリ、練習用）でデータは永続化されない。本番運用時はMySQL／PostgreSQL等へ切替え、Flyway等でスキーマをバージョン管理する想定。</a:t>
+              <a:t>A. 2026年8月にPostgreSQL（本番想定DB）へ移行済み。Flywayでスキーマ・初期データをバージョン管理し、データは永続化される（テストのみH2インメモリで完結）。</a:t>
             </a:r>
             <a:endParaRPr lang="en-US" sz="1300" dirty="0"/>
           </a:p>
@@ -8587,7 +8587,7 @@
                 <a:ea typeface="Yu Gothic" pitchFamily="34" charset="-122"/>
                 <a:cs typeface="Yu Gothic" pitchFamily="34" charset="-120"/>
               </a:rPr>
-              <a:t>関連資料：docs/project-overview.xlsx（業務フロー・DB構成・動作確認手順）</a:t>
+              <a:t>関連資料：docs/プロジェクトの概要.xlsx（業務フロー・DB構成・動作確認手順）／ GitHub: github.com/maythazinoo12mm/beautyPOS</a:t>
             </a:r>
             <a:endParaRPr lang="en-US" sz="1100" dirty="0"/>
           </a:p>
